--- a/3.1 Hoofdstuk 1 - Markten/3.1.2 Paragraaf 2 - Marktvormen/2. Leren/3.1.2 Marktvormen – presentatie.pptx
+++ b/3.1 Hoofdstuk 1 - Markten/3.1.2 Paragraaf 2 - Marktvormen/2. Leren/3.1.2 Marktvormen – presentatie.pptx
@@ -1879,6 +1879,8 @@
               </a:rPr>
               <a:t>De vijf marktvormen benoemen en hun kenmerken beschrijven</a:t>
             </a:r>
+          </a:p>
+          <a:p>
             <a:pPr algn="l" marL="342900" indent="-342900">
               <a:lnSpc>
                 <a:spcPct val="150000"/>
@@ -1900,6 +1902,8 @@
               </a:rPr>
               <a:t>Een marktvorm herkennen vanuit een beschrijving</a:t>
             </a:r>
+          </a:p>
+          <a:p>
             <a:pPr algn="l" marL="342900" indent="-342900">
               <a:lnSpc>
                 <a:spcPct val="150000"/>
@@ -1921,6 +1925,8 @@
               </a:rPr>
               <a:t>Verband leggen tussen marktstructuur en concurrentie</a:t>
             </a:r>
+          </a:p>
+          <a:p>
             <a:pPr algn="l" marL="342900" indent="-342900">
               <a:lnSpc>
                 <a:spcPct val="150000"/>
@@ -1942,7 +1948,6 @@
               </a:rPr>
               <a:t>Voor- en nadelen van marktvormen benoemen</a:t>
             </a:r>
-            <a:endParaRPr lang="en-US" sz="1500" dirty="0"/>
           </a:p>
         </p:txBody>
       </p:sp>
@@ -3778,6 +3783,10 @@
             </a:outerShdw>
           </a:effectLst>
         </p:spPr>
+        <p:txBody>
+          <a:bodyPr/>
+          <a:p/>
+        </p:txBody>
       </p:sp>
       <p:sp>
         <p:nvSpPr>
@@ -3798,6 +3807,10 @@
           </a:solidFill>
           <a:ln/>
         </p:spPr>
+        <p:txBody>
+          <a:bodyPr/>
+          <a:p/>
+        </p:txBody>
       </p:sp>
       <p:sp>
         <p:nvSpPr>
@@ -3948,6 +3961,10 @@
             </a:outerShdw>
           </a:effectLst>
         </p:spPr>
+        <p:txBody>
+          <a:bodyPr/>
+          <a:p/>
+        </p:txBody>
       </p:sp>
       <p:sp>
         <p:nvSpPr>
@@ -3968,6 +3985,10 @@
           </a:solidFill>
           <a:ln/>
         </p:spPr>
+        <p:txBody>
+          <a:bodyPr/>
+          <a:p/>
+        </p:txBody>
       </p:sp>
       <p:sp>
         <p:nvSpPr>
@@ -4118,6 +4139,10 @@
             </a:outerShdw>
           </a:effectLst>
         </p:spPr>
+        <p:txBody>
+          <a:bodyPr/>
+          <a:p/>
+        </p:txBody>
       </p:sp>
       <p:sp>
         <p:nvSpPr>
@@ -4138,6 +4163,10 @@
           </a:solidFill>
           <a:ln/>
         </p:spPr>
+        <p:txBody>
+          <a:bodyPr/>
+          <a:p/>
+        </p:txBody>
       </p:sp>
       <p:sp>
         <p:nvSpPr>
@@ -4288,6 +4317,10 @@
             </a:outerShdw>
           </a:effectLst>
         </p:spPr>
+        <p:txBody>
+          <a:bodyPr/>
+          <a:p/>
+        </p:txBody>
       </p:sp>
       <p:sp>
         <p:nvSpPr>
@@ -4308,6 +4341,10 @@
           </a:solidFill>
           <a:ln/>
         </p:spPr>
+        <p:txBody>
+          <a:bodyPr/>
+          <a:p/>
+        </p:txBody>
       </p:sp>
       <p:sp>
         <p:nvSpPr>
@@ -4561,6 +4598,10 @@
             </a:outerShdw>
           </a:effectLst>
         </p:spPr>
+        <p:txBody>
+          <a:bodyPr/>
+          <a:p/>
+        </p:txBody>
       </p:sp>
       <p:sp>
         <p:nvSpPr>
@@ -4581,6 +4622,10 @@
           </a:solidFill>
           <a:ln/>
         </p:spPr>
+        <p:txBody>
+          <a:bodyPr/>
+          <a:p/>
+        </p:txBody>
       </p:sp>
       <p:sp>
         <p:nvSpPr>
@@ -4688,6 +4733,10 @@
             </a:outerShdw>
           </a:effectLst>
         </p:spPr>
+        <p:txBody>
+          <a:bodyPr/>
+          <a:p/>
+        </p:txBody>
       </p:sp>
       <p:sp>
         <p:nvSpPr>
@@ -4708,6 +4757,10 @@
           </a:solidFill>
           <a:ln/>
         </p:spPr>
+        <p:txBody>
+          <a:bodyPr/>
+          <a:p/>
+        </p:txBody>
       </p:sp>
       <p:sp>
         <p:nvSpPr>
@@ -5796,6 +5849,10 @@
             </a:outerShdw>
           </a:effectLst>
         </p:spPr>
+        <p:txBody>
+          <a:bodyPr/>
+          <a:p/>
+        </p:txBody>
       </p:sp>
       <p:sp>
         <p:nvSpPr>
@@ -5816,6 +5873,10 @@
           </a:solidFill>
           <a:ln/>
         </p:spPr>
+        <p:txBody>
+          <a:bodyPr/>
+          <a:p/>
+        </p:txBody>
       </p:sp>
       <p:sp>
         <p:nvSpPr>
@@ -5999,6 +6060,10 @@
             </a:outerShdw>
           </a:effectLst>
         </p:spPr>
+        <p:txBody>
+          <a:bodyPr/>
+          <a:p/>
+        </p:txBody>
       </p:sp>
       <p:sp>
         <p:nvSpPr>
@@ -6019,6 +6084,10 @@
           </a:solidFill>
           <a:ln/>
         </p:spPr>
+        <p:txBody>
+          <a:bodyPr/>
+          <a:p/>
+        </p:txBody>
       </p:sp>
       <p:sp>
         <p:nvSpPr>
@@ -6305,6 +6374,10 @@
             </a:outerShdw>
           </a:effectLst>
         </p:spPr>
+        <p:txBody>
+          <a:bodyPr/>
+          <a:p/>
+        </p:txBody>
       </p:sp>
       <p:sp>
         <p:nvSpPr>
@@ -6325,6 +6398,10 @@
           </a:solidFill>
           <a:ln/>
         </p:spPr>
+        <p:txBody>
+          <a:bodyPr/>
+          <a:p/>
+        </p:txBody>
       </p:sp>
       <p:sp>
         <p:nvSpPr>
@@ -6435,6 +6512,10 @@
             </a:outerShdw>
           </a:effectLst>
         </p:spPr>
+        <p:txBody>
+          <a:bodyPr/>
+          <a:p/>
+        </p:txBody>
       </p:sp>
       <p:sp>
         <p:nvSpPr>
@@ -6455,6 +6536,10 @@
           </a:solidFill>
           <a:ln/>
         </p:spPr>
+        <p:txBody>
+          <a:bodyPr/>
+          <a:p/>
+        </p:txBody>
       </p:sp>
       <p:sp>
         <p:nvSpPr>
@@ -6565,6 +6650,10 @@
             </a:outerShdw>
           </a:effectLst>
         </p:spPr>
+        <p:txBody>
+          <a:bodyPr/>
+          <a:p/>
+        </p:txBody>
       </p:sp>
       <p:sp>
         <p:nvSpPr>
@@ -6585,6 +6674,10 @@
           </a:solidFill>
           <a:ln/>
         </p:spPr>
+        <p:txBody>
+          <a:bodyPr/>
+          <a:p/>
+        </p:txBody>
       </p:sp>
       <p:sp>
         <p:nvSpPr>
@@ -6812,6 +6905,8 @@
               </a:rPr>
               <a:t>Vijf marktvormen en hun kenmerken</a:t>
             </a:r>
+          </a:p>
+          <a:p>
             <a:pPr algn="l" marL="342900" indent="-342900">
               <a:lnSpc>
                 <a:spcPct val="160000"/>
@@ -6833,6 +6928,8 @@
               </a:rPr>
               <a:t>Twee sleutelvragen: hoeveel aanbieders? homogeen of heterogeen?</a:t>
             </a:r>
+          </a:p>
+          <a:p>
             <a:pPr algn="l" marL="342900" indent="-342900">
               <a:lnSpc>
                 <a:spcPct val="160000"/>
@@ -6854,6 +6951,8 @@
               </a:rPr>
               <a:t>Spectrum: van monopolie tot volkomen concurrentie</a:t>
             </a:r>
+          </a:p>
+          <a:p>
             <a:pPr algn="l" marL="342900" indent="-342900">
               <a:lnSpc>
                 <a:spcPct val="160000"/>
@@ -6875,6 +6974,8 @@
               </a:rPr>
               <a:t>Concurrentie stimuleert innovatie en drukt prijzen</a:t>
             </a:r>
+          </a:p>
+          <a:p>
             <a:pPr algn="l" marL="342900" indent="-342900">
               <a:lnSpc>
                 <a:spcPct val="160000"/>
@@ -6896,7 +6997,6 @@
               </a:rPr>
               <a:t>Monopolie kan soms nuttig zijn (natuurlijk monopolie)</a:t>
             </a:r>
-            <a:endParaRPr lang="en-US" sz="1500" dirty="0"/>
           </a:p>
         </p:txBody>
       </p:sp>
